--- a/DBTUNING/ch14_실무SQL문제/ch14_교안.pptx
+++ b/DBTUNING/ch14_실무SQL문제/ch14_교안.pptx
@@ -543,7 +543,7 @@
           <a:lstStyle/>
           <a:p>
             <a:r>
-              <a:t>제12장은 지금까지의 시선을 한 칸 밖으로 옮기는 장이다. 앞의 열한 개 장이 'SQL 한 문장을 어떻게 고칠 것인가'를 다뤘다면 이 장은 '그 문장이 몇 번 불리는가'를 다룬다. 실행계획이 아무 문제 없어 보이는데도 화면이 느린 사고가 실무에서 반복되는데, 원인이 SQL 안이 아니라 애플리케이션의 호출 구조에 있기 때문이다. 첫 시간에 던질 질문은 하나다. 훌륭한 SQL을 스무 번 부르면 그것은 훌륭한 SQL인가. 이 장의 모든 값은 진료비청구심사 실습 DB 실측이라 그대로 재현할 수 있다.</a:t>
+              <a:t>제ch14은 지금까지의 시선을 한 칸 밖으로 옮기는 장이다. 앞의 열한 개 장이 'SQL 한 문장을 어떻게 고칠 것인가'를 다뤘다면 이 장은 '그 문장이 몇 번 불리는가'를 다룬다. 실행계획이 아무 문제 없어 보이는데도 화면이 느린 사고가 실무에서 반복되는데, 원인이 SQL 안이 아니라 애플리케이션의 호출 구조에 있기 때문이다. 첫 시간에 던질 질문은 하나다. 훌륭한 SQL을 스무 번 부르면 그것은 훌륭한 SQL인가. 이 장의 모든 값은 진료비청구심사 실습 DB 실측이라 그대로 재현할 수 있다.</a:t>
             </a:r>
           </a:p>
         </p:txBody>
@@ -893,7 +893,7 @@
           <a:lstStyle/>
           <a:p>
             <a:r>
-              <a:t>Chapter 4를 다시 펼쳐 같은 테이블의 단건 조회 실행계획을 잠깐 보여 주면 연결이 매끄럽다. 학습자가 흔히 오해하는 지점은 결과가 적으면 비용도 적을 것이라 생각하는 것인데, Full Scan은 결과 건수와 무관하게 테이블 크기에 비례한다. 조건에 맞는 행이 한 건도 없어도 비용은 똑같이 든다. 이 성질은 다음 슬라이드의 곱셈 논리를 성립시키는 전제이므로 여기서 확실히 못 박고 넘어가야 한다. 실무에서는 PK가 있으니 인덱스도 있는 셈이라고 넘겨짚다가 사고가 난다. PK 컬럼과 조회 조건 컬럼이 다르면 그 인덱스는 이 조회에 아무 도움이 되지 않는다.</a:t>
+              <a:t>ch05를 다시 펼쳐 같은 테이블의 단건 조회 실행계획을 잠깐 보여 주면 연결이 매끄럽다. 학습자가 흔히 오해하는 지점은 결과가 적으면 비용도 적을 것이라 생각하는 것인데, Full Scan은 결과 건수와 무관하게 테이블 크기에 비례한다. 조건에 맞는 행이 한 건도 없어도 비용은 똑같이 든다. 이 성질은 다음 슬라이드의 곱셈 논리를 성립시키는 전제이므로 여기서 확실히 못 박고 넘어가야 한다. 실무에서는 PK가 있으니 인덱스도 있는 셈이라고 넘겨짚다가 사고가 난다. PK 컬럼과 조회 조건 컬럼이 다르면 그 인덱스는 이 조회에 아무 도움이 되지 않는다.</a:t>
             </a:r>
           </a:p>
         </p:txBody>
@@ -963,7 +963,7 @@
           <a:lstStyle/>
           <a:p>
             <a:r>
-              <a:t>여기서 버퍼 캐시 이야기가 나오면 잠깐 다뤄 주는 것이 좋다. 두 번째 반복부터는 블록이 메모리에 올라와 있으니 물리 I/O는 줄어드는 것이 맞다. 하지만 Buffers는 논리적 I/O, 즉 블록을 몇 번 만졌는가를 세는 값이라 캐시에 있어도 그대로 카운트된다. 메모리에서 읽어도 CPU는 쓴다는 것이 1장에서 배운 내용이다. 캐시가 있으니 괜찮지 않느냐는 반론은 여기서 정리하고 넘어가야 이후 숫자 해석이 흔들리지 않는다.</a:t>
+              <a:t>여기서 버퍼 캐시 이야기가 나오면 잠깐 다뤄 주는 것이 좋다. 두 번째 반복부터는 블록이 메모리에 올라와 있으니 물리 I/O는 줄어드는 것이 맞다. 하지만 Buffers는 논리적 I/O, 즉 블록을 몇 번 만졌는가를 세는 값이라 캐시에 있어도 그대로 카운트된다. 메모리에서 읽어도 CPU는 쓴다는 것이 ch01에서 배운 내용이다. 캐시가 있으니 괜찮지 않느냐는 반론은 여기서 정리하고 넘어가야 이후 숫자 해석이 흔들리지 않는다.</a:t>
             </a:r>
           </a:p>
         </p:txBody>
@@ -1173,7 +1173,7 @@
           <a:lstStyle/>
           <a:p>
             <a:r>
-              <a:t>코드를 보여 주기 전에 실습 재현 조건을 한 번 더 확인해 두자. 두 코드는 같은 결과를 내야 비교가 성립한다. 병원 1번의 청구 중 스무 건을 고르고, 각 청구의 상세내역 건수를 얻는다는 목표가 동일하다. 결과가 같은 두 방법 중 자원을 덜 쓰는 쪽을 고르는 것이 이 과정의 정의라는 1장의 문장을 여기서 다시 꺼내면 흐름이 이어진다. 학습자에게는 두 코드를 직접 실행해 결과 집합을 비교해 보게 하는 것이 좋다. 결과가 같다는 사실을 눈으로 확인하고 나서야 비용 비교가 공정하다는 확신이 생기고, 이후 숫자 해석에 다른 의심이 끼어들지 않는다.</a:t>
+              <a:t>코드를 보여 주기 전에 실습 재현 조건을 한 번 더 확인해 두자. 두 코드는 같은 결과를 내야 비교가 성립한다. 병원 1번의 청구 중 스무 건을 고르고, 각 청구의 상세내역 건수를 얻는다는 목표가 동일하다. 결과가 같은 두 방법 중 자원을 덜 쓰는 쪽을 고르는 것이 이 과정의 정의라는 ch01의 문장을 여기서 다시 꺼내면 흐름이 이어진다. 학습자에게는 두 코드를 직접 실행해 결과 집합을 비교해 보게 하는 것이 좋다. 결과가 같다는 사실을 눈으로 확인하고 나서야 비용 비교가 공정하다는 확신이 생기고, 이후 숫자 해석에 다른 의심이 끼어들지 않는다.</a:t>
             </a:r>
           </a:p>
         </p:txBody>
@@ -6500,7 +6500,7 @@
                 </a:solidFill>
                 <a:latin typeface="Malgun Gothic"/>
               </a:rPr>
-              <a:t>Oracle SQL 튜닝 과정  ·  제12장</a:t>
+              <a:t>Oracle SQL 튜닝 과정  ·  제ch14</a:t>
             </a:r>
           </a:p>
         </p:txBody>
@@ -7042,7 +7042,7 @@
                 </a:solidFill>
                 <a:latin typeface="Malgun Gothic"/>
               </a:rPr>
-              <a:t>    –  Chapter 4·13과 연결되는 주제 — 같은 조건도 분포에 따라 유불리가 뒤집힌다</a:t>
+              <a:t>    –  ch05·ch08과 연결되는 주제 — 같은 조건도 분포에 따라 유불리가 뒤집힌다</a:t>
             </a:r>
           </a:p>
           <a:p>
@@ -7699,7 +7699,7 @@
                 </a:solidFill>
                 <a:latin typeface="Malgun Gothic"/>
               </a:rPr>
-              <a:t>    –  Chapter 4에서 이미 확인한 사례와 같은 상황이다</a:t>
+              <a:t>    –  ch05에서 이미 확인한 사례와 같은 상황이다</a:t>
             </a:r>
           </a:p>
           <a:p>
@@ -8140,7 +8140,7 @@
                 </a:solidFill>
                 <a:latin typeface="Malgun Gothic"/>
               </a:rPr>
-              <a:t>    –  Hash Join의 특성 — Chapter 7에서 다룬 내용</a:t>
+              <a:t>    –  Hash Join의 특성 — ch09에서 다룬 내용</a:t>
             </a:r>
           </a:p>
           <a:p>
@@ -9558,7 +9558,7 @@
                 </a:solidFill>
                 <a:latin typeface="Malgun Gothic"/>
               </a:rPr>
-              <a:t>    –  만약 리터럴을 매번 다르게 넣었다면 하드 파싱 반복이라는 문제가 더 붙는다 — Chapter 2</a:t>
+              <a:t>    –  만약 리터럴을 매번 다르게 넣었다면 하드 파싱 반복이라는 문제가 더 붙는다 — ch02</a:t>
             </a:r>
           </a:p>
           <a:p>
@@ -11137,7 +11137,7 @@
                 </a:solidFill>
                 <a:latin typeface="Malgun Gothic"/>
               </a:rPr>
-              <a:t>    –  이 값이 Chapter 4에서 확인한 CLAIM_DETAILS 단건 조회 Full Scan 비용(약 6,621)과 거의 같다</a:t>
+              <a:t>    –  이 값이 ch05에서 확인한 CLAIM_DETAILS 단건 조회 Full Scan 비용(약 6,621)과 거의 같다</a:t>
             </a:r>
           </a:p>
           <a:p>
@@ -11192,7 +11192,7 @@
                 </a:solidFill>
                 <a:latin typeface="Malgun Gothic"/>
               </a:rPr>
-              <a:t>    –  시간 값은 캐시 상태에 흔들리므로 판단의 주된 근거는 Buffers로 둔다(1장 원칙)</a:t>
+              <a:t>    –  시간 값은 캐시 상태에 흔들리므로 판단의 주된 근거는 Buffers로 둔다(ch01 원칙)</a:t>
             </a:r>
           </a:p>
           <a:p>
@@ -14337,7 +14337,7 @@
                 </a:solidFill>
                 <a:latin typeface="Malgun Gothic"/>
               </a:rPr>
-              <a:t>    –  Chapter 4 원칙: 결과가 몇 건이든 Full Scan은 고정비용이지만</a:t>
+              <a:t>    –  ch05 원칙: 결과가 몇 건이든 Full Scan은 고정비용이지만</a:t>
             </a:r>
           </a:p>
           <a:p>
@@ -16071,7 +16071,7 @@
                 </a:solidFill>
                 <a:latin typeface="Malgun Gothic"/>
               </a:rPr>
-              <a:t>•  실습문제 10문항: SQL튜닝_Ch12_문제.md</a:t>
+              <a:t>•  실습문제 10문항: ch14_문제.md</a:t>
             </a:r>
           </a:p>
           <a:p>
@@ -16148,7 +16148,7 @@
                 </a:solidFill>
                 <a:latin typeface="Malgun Gothic"/>
               </a:rPr>
-              <a:t>    –  7번 — 바인드 변수 대신 리터럴을 썼다면 생겼을 추가 문제(Chapter 2)</a:t>
+              <a:t>    –  7번 — 바인드 변수 대신 리터럴을 썼다면 생겼을 추가 문제(ch02)</a:t>
             </a:r>
           </a:p>
           <a:p>
@@ -16330,7 +16330,7 @@
                 </a:solidFill>
                 <a:latin typeface="Malgun Gothic"/>
               </a:rPr>
-              <a:t>•  1장부터 11장까지는 'SQL 한 문장'을 분석 단위로 삼았다</a:t>
+              <a:t>•  ch01부터 ch13까지는 'SQL 한 문장'을 분석 단위로 삼았다</a:t>
             </a:r>
           </a:p>
           <a:p>

--- a/DBTUNING/ch14_실무SQL문제/ch14_교안.pptx
+++ b/DBTUNING/ch14_실무SQL문제/ch14_교안.pptx
@@ -543,7 +543,7 @@
           <a:lstStyle/>
           <a:p>
             <a:r>
-              <a:t>제ch14은 지금까지의 시선을 한 칸 밖으로 옮기는 장이다. 앞의 열한 개 장이 'SQL 한 문장을 어떻게 고칠 것인가'를 다뤘다면 이 장은 '그 문장이 몇 번 불리는가'를 다룬다. 실행계획이 아무 문제 없어 보이는데도 화면이 느린 사고가 실무에서 반복되는데, 원인이 SQL 안이 아니라 애플리케이션의 호출 구조에 있기 때문이다. 첫 시간에 던질 질문은 하나다. 훌륭한 SQL을 스무 번 부르면 그것은 훌륭한 SQL인가. 이 장의 모든 값은 진료비청구심사 실습 DB 실측이라 그대로 재현할 수 있다.</a:t>
+              <a:t>ch14은 지금까지의 시선을 한 칸 밖으로 옮기는 장이다. 앞의 열한 개 장이 'SQL 한 문장을 어떻게 고칠 것인가'를 다뤘다면 이 장은 '그 문장이 몇 번 불리는가'를 다룬다. 실행계획이 아무 문제 없어 보이는데도 화면이 느린 사고가 실무에서 반복되는데, 원인이 SQL 안이 아니라 애플리케이션의 호출 구조에 있기 때문이다. 첫 시간에 던질 질문은 하나다. 훌륭한 SQL을 스무 번 부르면 그것은 훌륭한 SQL인가. 이 장의 모든 값은 진료비청구심사 실습 DB 실측이라 그대로 재현할 수 있다.</a:t>
             </a:r>
           </a:p>
         </p:txBody>
@@ -6500,7 +6500,7 @@
                 </a:solidFill>
                 <a:latin typeface="Malgun Gothic"/>
               </a:rPr>
-              <a:t>Oracle SQL 튜닝 과정  ·  제ch14</a:t>
+              <a:t>Oracle SQL 튜닝 과정  ·  ch14</a:t>
             </a:r>
           </a:p>
         </p:txBody>
